--- a/first_aid_tema1_numbered/5_Обеспечение_безопасных_условий_и_профилактика_инфекций.pptx
+++ b/first_aid_tema1_numbered/5_Обеспечение_безопасных_условий_и_профилактика_инфекций.pptx
@@ -65321,6 +65321,9 @@
               <a:t/>
             </a:fld>
             <a:r>
+              <a:rPr>
+                <a:solidFill/>
+              </a:rPr>
               <a:t>2</a:t>
             </a:r>
             <a:endParaRPr kumimoji="0" sz="3500" b="0" i="0" u="none" strike="noStrike" kern="0" cap="none" spc="0" normalizeH="0" baseline="0" noProof="0">
@@ -65792,15 +65795,21 @@
               <a:defRPr/>
             </a:pPr>
             <a:r>
-              <a:rPr lang="ru-RU" sz="2800"/>
+              <a:rPr lang="ru-RU" sz="2800">
+                <a:solidFill/>
+              </a:rPr>
               <a:t>Перед началом действий на месте происшествия следует обеспечить </a:t>
             </a:r>
             <a:r>
-              <a:rPr lang="ru-RU" sz="2800" b="1"/>
+              <a:rPr lang="ru-RU" sz="2800" b="1">
+                <a:solidFill/>
+              </a:rPr>
               <a:t>безопасные условия </a:t>
             </a:r>
             <a:r>
-              <a:rPr lang="ru-RU" sz="2800"/>
+              <a:rPr lang="ru-RU" sz="2800">
+                <a:solidFill/>
+              </a:rPr>
               <a:t>для оказания первой помощи. </a:t>
             </a:r>
           </a:p>
@@ -65815,7 +65824,9 @@
               <a:defRPr/>
             </a:pPr>
             <a:r>
-              <a:rPr lang="ru-RU" sz="2800"/>
+              <a:rPr lang="ru-RU" sz="2800">
+                <a:solidFill/>
+              </a:rPr>
               <a:t>Для снижения риска поражения необходимо, например: </a:t>
             </a:r>
             <a:endParaRPr/>
@@ -65833,7 +65844,9 @@
               <a:defRPr/>
             </a:pPr>
             <a:r>
-              <a:rPr lang="ru-RU" sz="2800"/>
+              <a:rPr lang="ru-RU" sz="2800">
+                <a:solidFill/>
+              </a:rPr>
               <a:t>выключить электричество, </a:t>
             </a:r>
           </a:p>
@@ -65844,7 +65857,9 @@
               <a:defRPr/>
             </a:pPr>
             <a:r>
-              <a:rPr lang="ru-RU" sz="2800"/>
+              <a:rPr lang="ru-RU" sz="2800">
+                <a:solidFill/>
+              </a:rPr>
               <a:t>перекрыть бытовой газ, </a:t>
             </a:r>
           </a:p>
@@ -65855,7 +65870,9 @@
               <a:defRPr/>
             </a:pPr>
             <a:r>
-              <a:rPr lang="ru-RU" sz="2800"/>
+              <a:rPr lang="ru-RU" sz="2800">
+                <a:solidFill/>
+              </a:rPr>
               <a:t>установить знаки аварийной остановки, </a:t>
             </a:r>
           </a:p>
@@ -65866,7 +65883,9 @@
               <a:defRPr/>
             </a:pPr>
             <a:r>
-              <a:rPr lang="ru-RU" sz="2800"/>
+              <a:rPr lang="ru-RU" sz="2800">
+                <a:solidFill/>
+              </a:rPr>
               <a:t>перегородить проезжую часть автомобилем, </a:t>
             </a:r>
           </a:p>
@@ -65877,7 +65896,9 @@
               <a:defRPr/>
             </a:pPr>
             <a:r>
-              <a:rPr lang="ru-RU" sz="2800"/>
+              <a:rPr lang="ru-RU" sz="2800">
+                <a:solidFill/>
+              </a:rPr>
               <a:t>попытаться потушить пожар, </a:t>
             </a:r>
           </a:p>
@@ -65888,7 +65909,9 @@
               <a:defRPr/>
             </a:pPr>
             <a:r>
-              <a:rPr lang="ru-RU" sz="2800"/>
+              <a:rPr lang="ru-RU" sz="2800">
+                <a:solidFill/>
+              </a:rPr>
               <a:t>сообщить собравшимся людям, что сейчас будет оказываться первая помощь. </a:t>
             </a:r>
             <a:endParaRPr/>
@@ -65904,15 +65927,21 @@
               <a:defRPr/>
             </a:pPr>
             <a:r>
-              <a:rPr lang="ru-RU" sz="2800"/>
+              <a:rPr lang="ru-RU" sz="2800">
+                <a:solidFill/>
+              </a:rPr>
               <a:t>Не следует пытаться оказывать первую помощь в </a:t>
             </a:r>
             <a:r>
-              <a:rPr lang="ru-RU" sz="2800" b="1"/>
+              <a:rPr lang="ru-RU" sz="2800" b="1">
+                <a:solidFill/>
+              </a:rPr>
               <a:t>неблагоприятных условиях</a:t>
             </a:r>
             <a:r>
-              <a:rPr lang="ru-RU" sz="2800"/>
+              <a:rPr lang="ru-RU" sz="2800">
+                <a:solidFill/>
+              </a:rPr>
               <a:t>. </a:t>
             </a:r>
             <a:endParaRPr/>
@@ -66552,6 +66581,9 @@
               <a:t/>
             </a:fld>
             <a:r>
+              <a:rPr>
+                <a:solidFill/>
+              </a:rPr>
               <a:t>4</a:t>
             </a:r>
             <a:endParaRPr kumimoji="0" sz="3500" b="0" i="0" u="none" strike="noStrike" kern="0" cap="none" spc="0" normalizeH="0" baseline="0" noProof="0">
@@ -67137,105 +67169,578 @@
       <p:grpSpPr/>
       <p:sp>
         <p:nvSpPr>
-          <p:cNvPr id="2" name="Rectangle 1"/>
+          <p:cNvPr id="866" name="Номер слайда"/>
+          <p:cNvSpPr txBox="1">
+            <a:spLocks noGrp="1"/>
+          </p:cNvSpPr>
+          <p:nvPr>
+            <p:ph type="sldNum" sz="quarter" idx="4294967295"/>
+          </p:nvPr>
+        </p:nvSpPr>
+        <p:spPr bwMode="auto">
+          <a:xfrm>
+            <a:off x="6350" y="6542537"/>
+            <a:ext cx="684000" cy="630942"/>
+          </a:xfrm>
+          <a:prstGeom prst="rect">
+            <a:avLst/>
+          </a:prstGeom>
+          <a:gradFill>
+            <a:gsLst>
+              <a:gs pos="0">
+                <a:srgbClr val="656565"/>
+              </a:gs>
+              <a:gs pos="50000">
+                <a:schemeClr val="accent6"/>
+              </a:gs>
+              <a:gs pos="100000">
+                <a:srgbClr val="444444"/>
+              </a:gs>
+            </a:gsLst>
+            <a:lin ang="5400000" scaled="1"/>
+          </a:gradFill>
+          <a:ln w="6350">
+            <a:solidFill>
+              <a:srgbClr val="DDDDDD"/>
+            </a:solidFill>
+            <a:miter lim="800000"/>
+          </a:ln>
+          <a:effectLst>
+            <a:outerShdw blurRad="63500" dist="19050" dir="5400000" rotWithShape="0">
+              <a:srgbClr val="000000">
+                <a:alpha val="63000"/>
+              </a:srgbClr>
+            </a:outerShdw>
+          </a:effectLst>
+        </p:spPr>
+        <p:txBody>
+          <a:bodyPr wrap="square"/>
+          <a:lstStyle>
+            <a:lvl1pPr>
+              <a:defRPr sz="3500">
+                <a:solidFill>
+                  <a:srgbClr val="FFFFFF"/>
+                </a:solidFill>
+              </a:defRPr>
+            </a:lvl1pPr>
+          </a:lstStyle>
+          <a:p>
+            <a:pPr marL="0" marR="0" lvl="0" indent="0" algn="ctr" defTabSz="1828434" rtl="0" eaLnBrk="1" fontAlgn="auto" latinLnBrk="0" hangingPunct="1">
+              <a:lnSpc>
+                <a:spcPct val="100000"/>
+              </a:lnSpc>
+              <a:spcBef>
+                <a:spcPts val="0"/>
+              </a:spcBef>
+              <a:spcAft>
+                <a:spcPts val="0"/>
+              </a:spcAft>
+              <a:buClrTx/>
+              <a:buSzTx/>
+              <a:buFontTx/>
+              <a:buNone/>
+              <a:tabLst/>
+              <a:defRPr/>
+            </a:pPr>
+            <a:fld id="{86CB4B4D-7CA3-9044-876B-883B54F8677D}" type="slidenum">
+              <a:rPr kumimoji="0" sz="3500" b="0" i="0" u="none" strike="noStrike" kern="0" cap="none" spc="0" normalizeH="0" baseline="0" noProof="0">
+                <a:ln>
+                  <a:noFill/>
+                </a:ln>
+                <a:solidFill>
+                  <a:srgbClr val="FFFFFF"/>
+                </a:solidFill>
+                <a:effectLst/>
+                <a:uLnTx/>
+                <a:uFillTx/>
+                <a:latin typeface="Open Sans Light"/>
+                <a:ea typeface="Open Sans"/>
+                <a:cs typeface="Calibri"/>
+                <a:sym typeface="Open Sans"/>
+              </a:rPr>
+              <a:pPr marL="0" marR="0" lvl="0" indent="0" algn="ctr" defTabSz="1828434" rtl="0" eaLnBrk="1" fontAlgn="auto" latinLnBrk="0" hangingPunct="1">
+                <a:lnSpc>
+                  <a:spcPct val="100000"/>
+                </a:lnSpc>
+                <a:spcBef>
+                  <a:spcPts val="0"/>
+                </a:spcBef>
+                <a:spcAft>
+                  <a:spcPts val="0"/>
+                </a:spcAft>
+                <a:buClrTx/>
+                <a:buSzTx/>
+                <a:buFontTx/>
+                <a:buNone/>
+                <a:tabLst/>
+                <a:defRPr/>
+              </a:pPr>
+              <a:t/>
+            </a:fld>
+            <a:r>
+              <a:rPr>
+                <a:solidFill/>
+              </a:rPr>
+              <a:t>5</a:t>
+            </a:r>
+            <a:endParaRPr kumimoji="0" sz="3500" b="0" i="0" u="none" strike="noStrike" kern="0" cap="none" spc="0" normalizeH="0" baseline="0" noProof="0">
+              <a:ln>
+                <a:noFill/>
+              </a:ln>
+              <a:solidFill>
+                <a:srgbClr val="FFFFFF"/>
+              </a:solidFill>
+              <a:effectLst/>
+              <a:uLnTx/>
+              <a:uFillTx/>
+              <a:latin typeface="Open Sans Light"/>
+              <a:ea typeface="Open Sans"/>
+              <a:cs typeface="Calibri"/>
+              <a:sym typeface="Open Sans"/>
+            </a:endParaRPr>
+          </a:p>
+        </p:txBody>
+      </p:sp>
+      <p:sp>
+        <p:nvSpPr>
+          <p:cNvPr id="29" name="TextBox 6"/>
+          <p:cNvSpPr txBox="1"/>
+          <p:nvPr/>
+        </p:nvSpPr>
+        <p:spPr bwMode="auto">
+          <a:xfrm>
+            <a:off x="2055993" y="1804451"/>
+            <a:ext cx="24280504" cy="800219"/>
+          </a:xfrm>
+          <a:prstGeom prst="rect">
+            <a:avLst/>
+          </a:prstGeom>
+          <a:ln w="12700">
+            <a:miter lim="400000"/>
+          </a:ln>
+        </p:spPr>
+        <p:txBody>
+          <a:bodyPr wrap="square" lIns="45720" rIns="45720">
+            <a:spAutoFit/>
+          </a:bodyPr>
+          <a:lstStyle>
+            <a:lvl1pPr>
+              <a:defRPr sz="6600">
+                <a:solidFill>
+                  <a:srgbClr val="010101"/>
+                </a:solidFill>
+                <a:latin typeface="Montserrat Semi Bold"/>
+                <a:ea typeface="Montserrat Semi Bold"/>
+                <a:cs typeface="Montserrat Semi Bold"/>
+              </a:defRPr>
+            </a:lvl1pPr>
+          </a:lstStyle>
+          <a:p>
+            <a:pPr lvl="0" defTabSz="914400" rtl="0">
+              <a:lnSpc>
+                <a:spcPct val="100000"/>
+              </a:lnSpc>
+              <a:defRPr/>
+            </a:pPr>
+            <a:r>
+              <a:rPr lang="ru-RU" sz="4600" dirty="0" b="0">
+                <a:solidFill>
+                  <a:srgbClr val="404040"/>
+                </a:solidFill>
+                <a:latin typeface="PFDinDisplayPro-Regular"/>
+                <a:ea typeface="PFDinDisplayPro-Regular"/>
+                <a:cs typeface="PFDinDisplayPro-Regular"/>
+                <a:sym typeface="Stem"/>
+              </a:rPr>
+              <a:t>МАСКА И ПЕРЧАТКИ ИЗ АПТЕЧКИ</a:t>
+            </a:r>
+          </a:p>
+        </p:txBody>
+      </p:sp>
+      <p:sp>
+        <p:nvSpPr>
+          <p:cNvPr id="22" name="Rectangle 29"/>
           <p:cNvSpPr/>
           <p:nvPr/>
         </p:nvSpPr>
-        <p:spPr>
-          <a:xfrm>
-            <a:off x="0" y="0"/>
-            <a:ext cx="24384000" cy="13716000"/>
-          </a:xfrm>
-          <a:prstGeom prst="rect">
-            <a:avLst/>
-          </a:prstGeom>
-          <a:solidFill>
-            <a:srgbClr val="FFFFFF"/>
-          </a:solidFill>
-          <a:ln>
-            <a:noFill/>
+        <p:spPr bwMode="auto">
+          <a:xfrm>
+            <a:off x="2061230" y="2604670"/>
+            <a:ext cx="11900310" cy="72000"/>
+          </a:xfrm>
+          <a:prstGeom prst="rect">
+            <a:avLst/>
+          </a:prstGeom>
+          <a:gradFill>
+            <a:gsLst>
+              <a:gs pos="0">
+                <a:srgbClr val="656565"/>
+              </a:gs>
+              <a:gs pos="50000">
+                <a:schemeClr val="accent6"/>
+              </a:gs>
+              <a:gs pos="100000">
+                <a:srgbClr val="444444"/>
+              </a:gs>
+            </a:gsLst>
+            <a:lin ang="5400000" scaled="1"/>
+          </a:gradFill>
+          <a:ln w="6350">
+            <a:solidFill>
+              <a:srgbClr val="DDDDDD"/>
+            </a:solidFill>
+            <a:miter/>
           </a:ln>
-        </p:spPr>
-        <p:style>
-          <a:lnRef idx="1">
-            <a:schemeClr val="accent1"/>
-          </a:lnRef>
-          <a:fillRef idx="3">
-            <a:schemeClr val="accent1"/>
-          </a:fillRef>
-          <a:effectRef idx="2">
-            <a:schemeClr val="accent1"/>
-          </a:effectRef>
-          <a:fontRef idx="minor">
-            <a:schemeClr val="lt1"/>
-          </a:fontRef>
-        </p:style>
-        <p:txBody>
-          <a:bodyPr rtlCol="0" anchor="ctr"/>
-          <a:lstStyle/>
-          <a:p>
-            <a:pPr algn="ctr"/>
-          </a:p>
-        </p:txBody>
-      </p:sp>
-      <p:sp>
-        <p:nvSpPr>
-          <p:cNvPr id="3" name="Rectangle 2"/>
+          <a:effectLst>
+            <a:outerShdw blurRad="63500" dist="19050" dir="5400000" rotWithShape="0">
+              <a:srgbClr val="000000">
+                <a:alpha val="63000"/>
+              </a:srgbClr>
+            </a:outerShdw>
+          </a:effectLst>
+        </p:spPr>
+        <p:txBody>
+          <a:bodyPr lIns="45720" rIns="45720" anchor="ctr"/>
+          <a:lstStyle/>
+          <a:p>
+            <a:pPr marL="0" marR="0" lvl="0" indent="0" algn="l" defTabSz="1828434" rtl="0" eaLnBrk="1" fontAlgn="auto" latinLnBrk="0" hangingPunct="1">
+              <a:lnSpc>
+                <a:spcPct val="100000"/>
+              </a:lnSpc>
+              <a:spcBef>
+                <a:spcPts val="0"/>
+              </a:spcBef>
+              <a:spcAft>
+                <a:spcPts val="0"/>
+              </a:spcAft>
+              <a:buClrTx/>
+              <a:buSzTx/>
+              <a:buFontTx/>
+              <a:buNone/>
+              <a:tabLst/>
+              <a:defRPr>
+                <a:solidFill>
+                  <a:srgbClr val="FFFFFF"/>
+                </a:solidFill>
+              </a:defRPr>
+            </a:pPr>
+            <a:endParaRPr kumimoji="0" sz="3500" b="0" i="0" u="none" strike="noStrike" kern="0" cap="none" spc="0" normalizeH="0" baseline="0" noProof="0">
+              <a:ln>
+                <a:noFill/>
+              </a:ln>
+              <a:solidFill>
+                <a:srgbClr val="FFFFFF"/>
+              </a:solidFill>
+              <a:effectLst/>
+              <a:uLnTx/>
+              <a:uFillTx/>
+              <a:latin typeface="Open Sans Light"/>
+              <a:ea typeface="Open Sans"/>
+              <a:cs typeface="Calibri"/>
+              <a:sym typeface="Open Sans"/>
+            </a:endParaRPr>
+          </a:p>
+        </p:txBody>
+      </p:sp>
+      <p:sp>
+        <p:nvSpPr>
+          <p:cNvPr id="5" name="Подзаголовок 2"/>
+          <p:cNvSpPr txBox="1">
+            <a:spLocks/>
+          </p:cNvSpPr>
+          <p:nvPr/>
+        </p:nvSpPr>
+        <p:spPr bwMode="auto">
+          <a:xfrm>
+            <a:off x="2055993" y="2753858"/>
+            <a:ext cx="6408712" cy="681807"/>
+          </a:xfrm>
+          <a:prstGeom prst="rect">
+            <a:avLst/>
+          </a:prstGeom>
+          <a:ln w="25400">
+            <a:miter lim="400000"/>
+          </a:ln>
+        </p:spPr>
+        <p:txBody>
+          <a:bodyPr tIns="91439" bIns="91439" anchor="ctr">
+            <a:normAutofit/>
+          </a:bodyPr>
+          <a:lstStyle>
+            <a:lvl1pPr marL="0" marR="0" indent="0" algn="r" defTabSz="1828800">
+              <a:lnSpc>
+                <a:spcPct val="110000"/>
+              </a:lnSpc>
+              <a:spcBef>
+                <a:spcPts val="0"/>
+              </a:spcBef>
+              <a:spcAft>
+                <a:spcPts val="0"/>
+              </a:spcAft>
+              <a:buClrTx/>
+              <a:buSzTx/>
+              <a:buFontTx/>
+              <a:buNone/>
+              <a:defRPr sz="2800" b="0" i="0" u="none" strike="noStrike" cap="none" spc="0">
+                <a:solidFill>
+                  <a:srgbClr val="535353"/>
+                </a:solidFill>
+                <a:latin typeface="Open Sans"/>
+                <a:ea typeface="Open Sans"/>
+                <a:cs typeface="Open Sans"/>
+              </a:defRPr>
+            </a:lvl1pPr>
+            <a:lvl2pPr marL="0" marR="0" indent="457200" algn="l" defTabSz="1828800">
+              <a:lnSpc>
+                <a:spcPct val="110000"/>
+              </a:lnSpc>
+              <a:spcBef>
+                <a:spcPts val="0"/>
+              </a:spcBef>
+              <a:spcAft>
+                <a:spcPts val="0"/>
+              </a:spcAft>
+              <a:buClrTx/>
+              <a:buSzTx/>
+              <a:buFontTx/>
+              <a:buNone/>
+              <a:defRPr sz="2400" b="0" i="0" u="none" strike="noStrike" cap="none" spc="0">
+                <a:solidFill>
+                  <a:srgbClr val="535353"/>
+                </a:solidFill>
+                <a:latin typeface="Open Sans"/>
+                <a:ea typeface="Open Sans"/>
+                <a:cs typeface="Open Sans"/>
+              </a:defRPr>
+            </a:lvl2pPr>
+            <a:lvl3pPr marL="0" marR="0" indent="914400" algn="l" defTabSz="1828800">
+              <a:lnSpc>
+                <a:spcPct val="110000"/>
+              </a:lnSpc>
+              <a:spcBef>
+                <a:spcPts val="0"/>
+              </a:spcBef>
+              <a:spcAft>
+                <a:spcPts val="0"/>
+              </a:spcAft>
+              <a:buClrTx/>
+              <a:buSzTx/>
+              <a:buFontTx/>
+              <a:buNone/>
+              <a:defRPr sz="2400" b="0" i="0" u="none" strike="noStrike" cap="none" spc="0">
+                <a:solidFill>
+                  <a:srgbClr val="535353"/>
+                </a:solidFill>
+                <a:latin typeface="Open Sans"/>
+                <a:ea typeface="Open Sans"/>
+                <a:cs typeface="Open Sans"/>
+              </a:defRPr>
+            </a:lvl3pPr>
+            <a:lvl4pPr marL="0" marR="0" indent="1371600" algn="l" defTabSz="1828800">
+              <a:lnSpc>
+                <a:spcPct val="110000"/>
+              </a:lnSpc>
+              <a:spcBef>
+                <a:spcPts val="0"/>
+              </a:spcBef>
+              <a:spcAft>
+                <a:spcPts val="0"/>
+              </a:spcAft>
+              <a:buClrTx/>
+              <a:buSzTx/>
+              <a:buFontTx/>
+              <a:buNone/>
+              <a:defRPr sz="2400" b="0" i="0" u="none" strike="noStrike" cap="none" spc="0">
+                <a:solidFill>
+                  <a:srgbClr val="535353"/>
+                </a:solidFill>
+                <a:latin typeface="Open Sans"/>
+                <a:ea typeface="Open Sans"/>
+                <a:cs typeface="Open Sans"/>
+              </a:defRPr>
+            </a:lvl4pPr>
+            <a:lvl5pPr marL="0" marR="0" indent="1828800" algn="l" defTabSz="1828800">
+              <a:lnSpc>
+                <a:spcPct val="110000"/>
+              </a:lnSpc>
+              <a:spcBef>
+                <a:spcPts val="0"/>
+              </a:spcBef>
+              <a:spcAft>
+                <a:spcPts val="0"/>
+              </a:spcAft>
+              <a:buClrTx/>
+              <a:buSzTx/>
+              <a:buFontTx/>
+              <a:buNone/>
+              <a:defRPr sz="2400" b="0" i="0" u="none" strike="noStrike" cap="none" spc="0">
+                <a:solidFill>
+                  <a:srgbClr val="535353"/>
+                </a:solidFill>
+                <a:latin typeface="Open Sans"/>
+                <a:ea typeface="Open Sans"/>
+                <a:cs typeface="Open Sans"/>
+              </a:defRPr>
+            </a:lvl5pPr>
+            <a:lvl6pPr marL="0" marR="0" indent="2286000" algn="l" defTabSz="1828800">
+              <a:lnSpc>
+                <a:spcPct val="110000"/>
+              </a:lnSpc>
+              <a:spcBef>
+                <a:spcPts val="0"/>
+              </a:spcBef>
+              <a:spcAft>
+                <a:spcPts val="0"/>
+              </a:spcAft>
+              <a:buClrTx/>
+              <a:buSzTx/>
+              <a:buFontTx/>
+              <a:buNone/>
+              <a:defRPr sz="2400" b="0" i="0" u="none" strike="noStrike" cap="none" spc="0">
+                <a:solidFill>
+                  <a:srgbClr val="0082B9"/>
+                </a:solidFill>
+                <a:latin typeface="Open Sans"/>
+                <a:ea typeface="Open Sans"/>
+                <a:cs typeface="Open Sans"/>
+              </a:defRPr>
+            </a:lvl6pPr>
+            <a:lvl7pPr marL="0" marR="0" indent="2743200" algn="l" defTabSz="1828800">
+              <a:lnSpc>
+                <a:spcPct val="110000"/>
+              </a:lnSpc>
+              <a:spcBef>
+                <a:spcPts val="0"/>
+              </a:spcBef>
+              <a:spcAft>
+                <a:spcPts val="0"/>
+              </a:spcAft>
+              <a:buClrTx/>
+              <a:buSzTx/>
+              <a:buFontTx/>
+              <a:buNone/>
+              <a:defRPr sz="2400" b="0" i="0" u="none" strike="noStrike" cap="none" spc="0">
+                <a:solidFill>
+                  <a:srgbClr val="0082B9"/>
+                </a:solidFill>
+                <a:latin typeface="Open Sans"/>
+                <a:ea typeface="Open Sans"/>
+                <a:cs typeface="Open Sans"/>
+              </a:defRPr>
+            </a:lvl7pPr>
+            <a:lvl8pPr marL="0" marR="0" indent="3200400" algn="l" defTabSz="1828800">
+              <a:lnSpc>
+                <a:spcPct val="110000"/>
+              </a:lnSpc>
+              <a:spcBef>
+                <a:spcPts val="0"/>
+              </a:spcBef>
+              <a:spcAft>
+                <a:spcPts val="0"/>
+              </a:spcAft>
+              <a:buClrTx/>
+              <a:buSzTx/>
+              <a:buFontTx/>
+              <a:buNone/>
+              <a:defRPr sz="2400" b="0" i="0" u="none" strike="noStrike" cap="none" spc="0">
+                <a:solidFill>
+                  <a:srgbClr val="0082B9"/>
+                </a:solidFill>
+                <a:latin typeface="Open Sans"/>
+                <a:ea typeface="Open Sans"/>
+                <a:cs typeface="Open Sans"/>
+              </a:defRPr>
+            </a:lvl8pPr>
+            <a:lvl9pPr marL="0" marR="0" indent="3657600" algn="l" defTabSz="1828800">
+              <a:lnSpc>
+                <a:spcPct val="110000"/>
+              </a:lnSpc>
+              <a:spcBef>
+                <a:spcPts val="0"/>
+              </a:spcBef>
+              <a:spcAft>
+                <a:spcPts val="0"/>
+              </a:spcAft>
+              <a:buClrTx/>
+              <a:buSzTx/>
+              <a:buFontTx/>
+              <a:buNone/>
+              <a:defRPr sz="2400" b="0" i="0" u="none" strike="noStrike" cap="none" spc="0">
+                <a:solidFill>
+                  <a:srgbClr val="0082B9"/>
+                </a:solidFill>
+                <a:latin typeface="Open Sans"/>
+                <a:ea typeface="Open Sans"/>
+                <a:cs typeface="Open Sans"/>
+              </a:defRPr>
+            </a:lvl9pPr>
+          </a:lstStyle>
+          <a:p>
+            <a:pPr marL="0" marR="0" lvl="0" indent="0" algn="r" defTabSz="1828800" eaLnBrk="1" fontAlgn="auto" latinLnBrk="0" hangingPunct="1">
+              <a:lnSpc>
+                <a:spcPct val="110000"/>
+              </a:lnSpc>
+              <a:spcBef>
+                <a:spcPts val="0"/>
+              </a:spcBef>
+              <a:spcAft>
+                <a:spcPts val="0"/>
+              </a:spcAft>
+              <a:buClrTx/>
+              <a:buSzTx/>
+              <a:buFontTx/>
+              <a:buNone/>
+              <a:tabLst/>
+              <a:defRPr/>
+            </a:pPr>
+            <a:r>
+              <a:rPr kumimoji="0" lang="ru-RU" sz="2800" b="0" i="0" u="none" strike="noStrike" kern="0" cap="none" spc="0" normalizeH="0" baseline="0" noProof="0">
+                <a:ln>
+                  <a:noFill/>
+                </a:ln>
+                <a:solidFill>
+                  <a:srgbClr val="535353"/>
+                </a:solidFill>
+                <a:effectLst/>
+                <a:uLnTx/>
+                <a:uFillTx/>
+                <a:latin typeface="Open Sans"/>
+                <a:ea typeface="Open Sans"/>
+                <a:cs typeface="Open Sans"/>
+              </a:rPr>
+              <a:t>Тема 1 · п. 5  Безопасные условия и профилактика инфекций</a:t>
+            </a:r>
+            <a:endParaRPr kumimoji="0" lang="ru-RU" sz="2800" b="0" i="0" u="none" strike="noStrike" kern="0" cap="none" spc="0" normalizeH="0" baseline="0" noProof="0" dirty="0">
+              <a:ln>
+                <a:noFill/>
+              </a:ln>
+              <a:solidFill>
+                <a:srgbClr val="535353"/>
+              </a:solidFill>
+              <a:effectLst/>
+              <a:uLnTx/>
+              <a:uFillTx/>
+              <a:latin typeface="Open Sans"/>
+              <a:ea typeface="Open Sans"/>
+              <a:cs typeface="Open Sans"/>
+            </a:endParaRPr>
+          </a:p>
+        </p:txBody>
+      </p:sp>
+      <p:sp>
+        <p:nvSpPr>
+          <p:cNvPr id="8" name="Прямоугольник 7"/>
           <p:cNvSpPr/>
           <p:nvPr/>
         </p:nvSpPr>
-        <p:spPr>
-          <a:xfrm>
-            <a:off x="0" y="0"/>
-            <a:ext cx="180000" cy="13716000"/>
-          </a:xfrm>
-          <a:prstGeom prst="rect">
-            <a:avLst/>
-          </a:prstGeom>
-          <a:solidFill>
-            <a:srgbClr val="E30613"/>
-          </a:solidFill>
-          <a:ln>
-            <a:noFill/>
-          </a:ln>
-        </p:spPr>
-        <p:style>
-          <a:lnRef idx="1">
-            <a:schemeClr val="accent1"/>
-          </a:lnRef>
-          <a:fillRef idx="3">
-            <a:schemeClr val="accent1"/>
-          </a:fillRef>
-          <a:effectRef idx="2">
-            <a:schemeClr val="accent1"/>
-          </a:effectRef>
-          <a:fontRef idx="minor">
-            <a:schemeClr val="lt1"/>
-          </a:fontRef>
-        </p:style>
-        <p:txBody>
-          <a:bodyPr rtlCol="0" anchor="ctr"/>
-          <a:lstStyle/>
-          <a:p>
-            <a:pPr algn="ctr"/>
-          </a:p>
-        </p:txBody>
-      </p:sp>
-      <p:sp>
-        <p:nvSpPr>
-          <p:cNvPr id="4" name="TextBox 3"/>
-          <p:cNvSpPr txBox="1"/>
-          <p:nvPr/>
-        </p:nvSpPr>
-        <p:spPr>
-          <a:xfrm>
-            <a:off x="220000" y="6540000"/>
-            <a:ext cx="900000" cy="600000"/>
-          </a:xfrm>
-          <a:prstGeom prst="rect">
-            <a:avLst/>
-          </a:prstGeom>
-          <a:noFill/>
+        <p:spPr bwMode="auto">
+          <a:xfrm>
+            <a:off x="2061252" y="3600000"/>
+            <a:ext cx="20000000" cy="9000000"/>
+          </a:xfrm>
+          <a:prstGeom prst="rect">
+            <a:avLst/>
+          </a:prstGeom>
         </p:spPr>
         <p:txBody>
           <a:bodyPr wrap="square">
@@ -67243,358 +67748,79 @@
           </a:bodyPr>
           <a:lstStyle/>
           <a:p>
-            <a:pPr algn="l"/>
-            <a:r>
-              <a:rPr sz="2200" b="1">
-                <a:solidFill>
-                  <a:srgbClr val="6B7280"/>
-                </a:solidFill>
-                <a:latin typeface="Arial"/>
+            <a:pPr>
+              <a:defRPr/>
+            </a:pPr>
+            <a:r>
+              <a:rPr lang="ru-RU" sz="2800">
+                <a:solidFill>
+                  <a:srgbClr val="404040"/>
+                </a:solidFill>
+                <a:latin typeface="Open Sans"/>
               </a:rPr>
-              <a:t>5</a:t>
-            </a:r>
-          </a:p>
-        </p:txBody>
-      </p:sp>
-      <p:sp>
-        <p:nvSpPr>
-          <p:cNvPr id="5" name="TextBox 4"/>
-          <p:cNvSpPr txBox="1"/>
-          <p:nvPr/>
-        </p:nvSpPr>
-        <p:spPr>
-          <a:xfrm>
-            <a:off x="2050000" y="1400000"/>
-            <a:ext cx="21000000" cy="1000000"/>
-          </a:xfrm>
-          <a:prstGeom prst="rect">
-            <a:avLst/>
-          </a:prstGeom>
-          <a:noFill/>
-        </p:spPr>
-        <p:txBody>
-          <a:bodyPr wrap="square">
-            <a:spAutoFit/>
-          </a:bodyPr>
-          <a:lstStyle/>
-          <a:p>
-            <a:pPr algn="l"/>
-            <a:r>
-              <a:rPr sz="2600" b="1">
-                <a:solidFill>
-                  <a:srgbClr val="1A1A1A"/>
-                </a:solidFill>
-                <a:latin typeface="Arial"/>
+              <a:t>По учебному пособию Минздрава (2025):</a:t>
+            </a:r>
+            <a:endParaRPr/>
+          </a:p>
+          <a:p>
+            <a:pPr>
+              <a:defRPr/>
+            </a:pPr>
+            <a:r>
+              <a:rPr lang="ru-RU" sz="2800">
+                <a:solidFill>
+                  <a:srgbClr val="404040"/>
+                </a:solidFill>
+                <a:latin typeface="Open Sans"/>
               </a:rPr>
-              <a:t>МАСКА И ПЕРЧАТКИ ИЗ АПТЕЧКИ</a:t>
-            </a:r>
-          </a:p>
-        </p:txBody>
-      </p:sp>
-      <p:sp>
-        <p:nvSpPr>
-          <p:cNvPr id="6" name="Rectangle 5"/>
-          <p:cNvSpPr/>
-          <p:nvPr/>
-        </p:nvSpPr>
-        <p:spPr>
-          <a:xfrm>
-            <a:off x="2060000" y="2500000"/>
-            <a:ext cx="12000000" cy="70000"/>
-          </a:xfrm>
-          <a:prstGeom prst="rect">
-            <a:avLst/>
-          </a:prstGeom>
-          <a:solidFill>
-            <a:srgbClr val="E30613"/>
-          </a:solidFill>
-          <a:ln>
-            <a:noFill/>
-          </a:ln>
-        </p:spPr>
-        <p:style>
-          <a:lnRef idx="1">
-            <a:schemeClr val="accent1"/>
-          </a:lnRef>
-          <a:fillRef idx="3">
-            <a:schemeClr val="accent1"/>
-          </a:fillRef>
-          <a:effectRef idx="2">
-            <a:schemeClr val="accent1"/>
-          </a:effectRef>
-          <a:fontRef idx="minor">
-            <a:schemeClr val="lt1"/>
-          </a:fontRef>
-        </p:style>
-        <p:txBody>
-          <a:bodyPr rtlCol="0" anchor="ctr"/>
-          <a:lstStyle/>
-          <a:p>
-            <a:pPr algn="ctr"/>
-          </a:p>
-        </p:txBody>
-      </p:sp>
-      <p:sp>
-        <p:nvSpPr>
-          <p:cNvPr id="7" name="TextBox 6"/>
-          <p:cNvSpPr txBox="1"/>
-          <p:nvPr/>
-        </p:nvSpPr>
-        <p:spPr>
-          <a:xfrm>
-            <a:off x="2050000" y="2650000"/>
-            <a:ext cx="18000000" cy="500000"/>
-          </a:xfrm>
-          <a:prstGeom prst="rect">
-            <a:avLst/>
-          </a:prstGeom>
-          <a:noFill/>
-        </p:spPr>
-        <p:txBody>
-          <a:bodyPr wrap="square">
-            <a:spAutoFit/>
-          </a:bodyPr>
-          <a:lstStyle/>
-          <a:p>
-            <a:pPr algn="l"/>
-            <a:r>
-              <a:rPr sz="1400" b="0">
-                <a:solidFill>
-                  <a:srgbClr val="6B7280"/>
-                </a:solidFill>
-                <a:latin typeface="Arial"/>
+              <a:t> </a:t>
+            </a:r>
+            <a:endParaRPr/>
+          </a:p>
+          <a:p>
+            <a:pPr>
+              <a:defRPr/>
+            </a:pPr>
+            <a:r>
+              <a:rPr lang="ru-RU" sz="2800">
+                <a:solidFill>
+                  <a:srgbClr val="404040"/>
+                </a:solidFill>
+                <a:latin typeface="Open Sans"/>
               </a:rPr>
-              <a:t>Тема 1 · п. 5  Безопасные условия и профилактика инфекций</a:t>
-            </a:r>
-          </a:p>
-        </p:txBody>
-      </p:sp>
-      <p:sp>
-        <p:nvSpPr>
-          <p:cNvPr id="8" name="Rounded Rectangle 7"/>
-          <p:cNvSpPr/>
-          <p:nvPr/>
-        </p:nvSpPr>
-        <p:spPr>
-          <a:xfrm>
-            <a:off x="2050000" y="3400000"/>
-            <a:ext cx="20000000" cy="8800000"/>
-          </a:xfrm>
-          <a:prstGeom prst="roundRect">
-            <a:avLst/>
-          </a:prstGeom>
-          <a:solidFill>
-            <a:srgbClr val="F7F7F8"/>
-          </a:solidFill>
-          <a:ln>
-            <a:noFill/>
-          </a:ln>
-        </p:spPr>
-        <p:style>
-          <a:lnRef idx="1">
-            <a:schemeClr val="accent1"/>
-          </a:lnRef>
-          <a:fillRef idx="3">
-            <a:schemeClr val="accent1"/>
-          </a:fillRef>
-          <a:effectRef idx="2">
-            <a:schemeClr val="accent1"/>
-          </a:effectRef>
-          <a:fontRef idx="minor">
-            <a:schemeClr val="lt1"/>
-          </a:fontRef>
-        </p:style>
-        <p:txBody>
-          <a:bodyPr rtlCol="0" anchor="ctr"/>
-          <a:lstStyle/>
-          <a:p>
-            <a:pPr algn="ctr"/>
-          </a:p>
-        </p:txBody>
-      </p:sp>
-      <p:sp>
-        <p:nvSpPr>
-          <p:cNvPr id="9" name="TextBox 8"/>
-          <p:cNvSpPr txBox="1"/>
-          <p:nvPr/>
-        </p:nvSpPr>
-        <p:spPr>
-          <a:xfrm>
-            <a:off x="2400000" y="3700000"/>
-            <a:ext cx="19000000" cy="8000000"/>
-          </a:xfrm>
-          <a:prstGeom prst="rect">
-            <a:avLst/>
-          </a:prstGeom>
-          <a:noFill/>
-        </p:spPr>
-        <p:txBody>
-          <a:bodyPr wrap="square">
-            <a:spAutoFit/>
-          </a:bodyPr>
-          <a:lstStyle/>
-          <a:p>
-            <a:pPr>
-              <a:spcAft>
-                <a:spcPts val="600"/>
-              </a:spcAft>
-            </a:pPr>
-            <a:r>
-              <a:rPr sz="1600" b="0">
-                <a:solidFill>
-                  <a:srgbClr val="1A1A1A"/>
-                </a:solidFill>
-                <a:latin typeface="Arial"/>
+              <a:t>• В аптечке для оказания первой помощи работниками есть медицинские маски — для снижения риска инфицирования оказывающего помощь.</a:t>
+            </a:r>
+            <a:endParaRPr/>
+          </a:p>
+          <a:p>
+            <a:pPr>
+              <a:defRPr/>
+            </a:pPr>
+            <a:r>
+              <a:rPr lang="ru-RU" sz="2800">
+                <a:solidFill>
+                  <a:srgbClr val="404040"/>
+                </a:solidFill>
+                <a:latin typeface="Open Sans"/>
               </a:rPr>
-              <a:t>Дополнение по пособию Минздрава (2025):</a:t>
-            </a:r>
-          </a:p>
-          <a:p>
-            <a:pPr>
-              <a:spcAft>
-                <a:spcPts val="600"/>
-              </a:spcAft>
-            </a:pPr>
-            <a:r>
-              <a:rPr sz="1600" b="0">
-                <a:solidFill>
-                  <a:srgbClr val="1A1A1A"/>
-                </a:solidFill>
-                <a:latin typeface="Arial"/>
+              <a:t>• Эти маски не используются для проведения искусственного дыхания (для ИВЛ — отдельное устройство «Рот–Устройство–Рот»).</a:t>
+            </a:r>
+            <a:endParaRPr/>
+          </a:p>
+          <a:p>
+            <a:pPr>
+              <a:defRPr/>
+            </a:pPr>
+            <a:r>
+              <a:rPr lang="ru-RU" sz="2800">
+                <a:solidFill>
+                  <a:srgbClr val="404040"/>
+                </a:solidFill>
+                <a:latin typeface="Open Sans"/>
               </a:rPr>
-              <a:t/>
-            </a:r>
-          </a:p>
-          <a:p>
-            <a:pPr>
-              <a:spcAft>
-                <a:spcPts val="600"/>
-              </a:spcAft>
-            </a:pPr>
-            <a:r>
-              <a:rPr sz="1600" b="0">
-                <a:solidFill>
-                  <a:srgbClr val="1A1A1A"/>
-                </a:solidFill>
-                <a:latin typeface="Arial"/>
-              </a:rPr>
-              <a:t>• В аптечке для оказания первой помощи работниками есть медицинские маски —</a:t>
-            </a:r>
-          </a:p>
-          <a:p>
-            <a:pPr>
-              <a:spcAft>
-                <a:spcPts val="600"/>
-              </a:spcAft>
-            </a:pPr>
-            <a:r>
-              <a:rPr sz="1600" b="0">
-                <a:solidFill>
-                  <a:srgbClr val="1A1A1A"/>
-                </a:solidFill>
-                <a:latin typeface="Arial"/>
-              </a:rPr>
-              <a:t>  для снижения риска инфицирования оказывающего помощь.</a:t>
-            </a:r>
-          </a:p>
-          <a:p>
-            <a:pPr>
-              <a:spcAft>
-                <a:spcPts val="600"/>
-              </a:spcAft>
-            </a:pPr>
-            <a:r>
-              <a:rPr sz="1600" b="0">
-                <a:solidFill>
-                  <a:srgbClr val="1A1A1A"/>
-                </a:solidFill>
-                <a:latin typeface="Arial"/>
-              </a:rPr>
-              <a:t>• Эти маски не используются для проведения искусственного дыхания</a:t>
-            </a:r>
-          </a:p>
-          <a:p>
-            <a:pPr>
-              <a:spcAft>
-                <a:spcPts val="600"/>
-              </a:spcAft>
-            </a:pPr>
-            <a:r>
-              <a:rPr sz="1600" b="0">
-                <a:solidFill>
-                  <a:srgbClr val="1A1A1A"/>
-                </a:solidFill>
-                <a:latin typeface="Arial"/>
-              </a:rPr>
-              <a:t>  (для ИВЛ — отдельное устройство «Рот–Устройство–Рот»).</a:t>
-            </a:r>
-          </a:p>
-          <a:p>
-            <a:pPr>
-              <a:spcAft>
-                <a:spcPts val="600"/>
-              </a:spcAft>
-            </a:pPr>
-            <a:r>
-              <a:rPr sz="1600" b="0">
-                <a:solidFill>
-                  <a:srgbClr val="1A1A1A"/>
-                </a:solidFill>
-                <a:latin typeface="Arial"/>
-              </a:rPr>
-              <a:t>• Перчатки медицинские — защита от контакта с кровью и другими биологическими</a:t>
-            </a:r>
-          </a:p>
-          <a:p>
-            <a:pPr>
-              <a:spcAft>
-                <a:spcPts val="600"/>
-              </a:spcAft>
-            </a:pPr>
-            <a:r>
-              <a:rPr sz="1600" b="0">
-                <a:solidFill>
-                  <a:srgbClr val="1A1A1A"/>
-                </a:solidFill>
-                <a:latin typeface="Arial"/>
-              </a:rPr>
-              <a:t>  жидкостями пострадавшего.</a:t>
-            </a:r>
-          </a:p>
-        </p:txBody>
-      </p:sp>
-      <p:sp>
-        <p:nvSpPr>
-          <p:cNvPr id="10" name="TextBox 9"/>
-          <p:cNvSpPr txBox="1"/>
-          <p:nvPr/>
-        </p:nvSpPr>
-        <p:spPr>
-          <a:xfrm>
-            <a:off x="2050000" y="12400000"/>
-            <a:ext cx="20000000" cy="600000"/>
-          </a:xfrm>
-          <a:prstGeom prst="rect">
-            <a:avLst/>
-          </a:prstGeom>
-          <a:noFill/>
-        </p:spPr>
-        <p:txBody>
-          <a:bodyPr wrap="square">
-            <a:spAutoFit/>
-          </a:bodyPr>
-          <a:lstStyle/>
-          <a:p>
-            <a:pPr algn="l"/>
-            <a:r>
-              <a:rPr sz="1100" b="0">
-                <a:solidFill>
-                  <a:srgbClr val="6B7280"/>
-                </a:solidFill>
-                <a:latin typeface="Arial"/>
-              </a:rPr>
-              <a:t>Дополнено по пособию Минздрава 2025.</a:t>
-            </a:r>
+              <a:t>• Перчатки медицинские — защита от контакта с кровью и другими биологическими жидкостями пострадавшего.</a:t>
+            </a:r>
+            <a:endParaRPr/>
           </a:p>
         </p:txBody>
       </p:sp>
